--- a/deck/namp-2026/out/2026_납품대금연동제_업종별밀도_응답난이도_3p.pptx
+++ b/deck/namp-2026/out/2026_납품대금연동제_업종별밀도_응답난이도_3p.pptx
@@ -2228,7 +2228,7 @@
       </p:sp>
       <p:pic>
         <p:nvPicPr>
-          <p:cNvPr id="40" name="Image 0" descr="/home/user/kstat-pm/deck/namp-2026/assets/s14-server.png">    </p:cNvPr>
+          <p:cNvPr id="40" name="Image 0" descr="s14-server">    </p:cNvPr>
           <p:cNvPicPr>
             <a:picLocks noChangeAspect="1"/>
           </p:cNvPicPr>
@@ -2560,7 +2560,7 @@
       </p:sp>
       <p:pic>
         <p:nvPicPr>
-          <p:cNvPr id="52" name="Image 1" descr="/home/user/kstat-pm/deck/namp-2026/assets/s14-factory.png">    </p:cNvPr>
+          <p:cNvPr id="52" name="Image 1" descr="s14-factory">    </p:cNvPr>
           <p:cNvPicPr>
             <a:picLocks noChangeAspect="1"/>
           </p:cNvPicPr>
@@ -2584,7 +2584,7 @@
       </p:pic>
       <p:pic>
         <p:nvPicPr>
-          <p:cNvPr id="53" name="Image 2" descr="/home/user/kstat-pm/deck/namp-2026/assets/s14-crane.png">    </p:cNvPr>
+          <p:cNvPr id="53" name="Image 2" descr="s14-crane">    </p:cNvPr>
           <p:cNvPicPr>
             <a:picLocks noChangeAspect="1"/>
           </p:cNvPicPr>
@@ -3062,7 +3062,7 @@
       </p:sp>
       <p:pic>
         <p:nvPicPr>
-          <p:cNvPr id="69" name="Image 3" descr="/home/user/kstat-pm/deck/namp-2026/assets/s14-clipboard.png">    </p:cNvPr>
+          <p:cNvPr id="69" name="Image 3" descr="s14-clipboard">    </p:cNvPr>
           <p:cNvPicPr>
             <a:picLocks noChangeAspect="1"/>
           </p:cNvPicPr>
@@ -3394,7 +3394,7 @@
       </p:sp>
       <p:pic>
         <p:nvPicPr>
-          <p:cNvPr id="81" name="Image 4" descr="/home/user/kstat-pm/deck/namp-2026/assets/s14-truck.png">    </p:cNvPr>
+          <p:cNvPr id="81" name="Image 4" descr="s14-truck">    </p:cNvPr>
           <p:cNvPicPr>
             <a:picLocks noChangeAspect="1"/>
           </p:cNvPicPr>
@@ -3768,7 +3768,7 @@
       </p:sp>
       <p:pic>
         <p:nvPicPr>
-          <p:cNvPr id="94" name="Image 5" descr="/home/user/kstat-pm/deck/namp-2026/assets/s14-icon1.png">    </p:cNvPr>
+          <p:cNvPr id="94" name="Image 5" descr="s14-icon1">    </p:cNvPr>
           <p:cNvPicPr>
             <a:picLocks noChangeAspect="1"/>
           </p:cNvPicPr>
@@ -3913,7 +3913,7 @@
       </p:sp>
       <p:pic>
         <p:nvPicPr>
-          <p:cNvPr id="98" name="Image 6" descr="/home/user/kstat-pm/deck/namp-2026/assets/s14-icon2.png">    </p:cNvPr>
+          <p:cNvPr id="98" name="Image 6" descr="s14-icon2">    </p:cNvPr>
           <p:cNvPicPr>
             <a:picLocks noChangeAspect="1"/>
           </p:cNvPicPr>
@@ -4058,7 +4058,7 @@
       </p:sp>
       <p:pic>
         <p:nvPicPr>
-          <p:cNvPr id="102" name="Image 7" descr="/home/user/kstat-pm/deck/namp-2026/assets/s14-icon3.png">    </p:cNvPr>
+          <p:cNvPr id="102" name="Image 7" descr="s14-icon3">    </p:cNvPr>
           <p:cNvPicPr>
             <a:picLocks noChangeAspect="1"/>
           </p:cNvPicPr>
@@ -4203,7 +4203,7 @@
       </p:sp>
       <p:pic>
         <p:nvPicPr>
-          <p:cNvPr id="106" name="Image 8" descr="/home/user/kstat-pm/deck/namp-2026/assets/s14-icon4.png">    </p:cNvPr>
+          <p:cNvPr id="106" name="Image 8" descr="s14-icon4">    </p:cNvPr>
           <p:cNvPicPr>
             <a:picLocks noChangeAspect="1"/>
           </p:cNvPicPr>
@@ -5242,7 +5242,7 @@
       </p:sp>
       <p:pic>
         <p:nvPicPr>
-          <p:cNvPr id="32" name="Image 0" descr="/home/user/kstat-pm/deck/namp-2026/assets/s15-factory.png">    </p:cNvPr>
+          <p:cNvPr id="32" name="Image 0" descr="s15-factory">    </p:cNvPr>
           <p:cNvPicPr>
             <a:picLocks noChangeAspect="1"/>
           </p:cNvPicPr>
@@ -6122,7 +6122,7 @@
       </p:sp>
       <p:pic>
         <p:nvPicPr>
-          <p:cNvPr id="61" name="Image 1" descr="/home/user/kstat-pm/deck/namp-2026/assets/s15-crane.png">    </p:cNvPr>
+          <p:cNvPr id="61" name="Image 1" descr="s15-crane">    </p:cNvPr>
           <p:cNvPicPr>
             <a:picLocks noChangeAspect="1"/>
           </p:cNvPicPr>
@@ -7694,7 +7694,7 @@
       </p:sp>
       <p:pic>
         <p:nvPicPr>
-          <p:cNvPr id="32" name="Image 0" descr="/home/user/kstat-pm/deck/namp-2026/assets/s16-server.png">    </p:cNvPr>
+          <p:cNvPr id="32" name="Image 0" descr="s16-server">    </p:cNvPr>
           <p:cNvPicPr>
             <a:picLocks noChangeAspect="1"/>
           </p:cNvPicPr>
@@ -8570,7 +8570,7 @@
       </p:sp>
       <p:pic>
         <p:nvPicPr>
-          <p:cNvPr id="61" name="Image 1" descr="/home/user/kstat-pm/deck/namp-2026/assets/s16-truck.png">    </p:cNvPr>
+          <p:cNvPr id="61" name="Image 1" descr="s16-truck">    </p:cNvPr>
           <p:cNvPicPr>
             <a:picLocks noChangeAspect="1"/>
           </p:cNvPicPr>
@@ -9426,7 +9426,7 @@
       </p:sp>
       <p:pic>
         <p:nvPicPr>
-          <p:cNvPr id="90" name="Image 2" descr="/home/user/kstat-pm/deck/namp-2026/assets/s16-clipboard.png">    </p:cNvPr>
+          <p:cNvPr id="90" name="Image 2" descr="s16-clipboard">    </p:cNvPr>
           <p:cNvPicPr>
             <a:picLocks noChangeAspect="1"/>
           </p:cNvPicPr>
